--- a/budget-transfer/reference/12-handbook.pptx
+++ b/budget-transfer/reference/12-handbook.pptx
@@ -3208,7 +3208,7 @@
                 <a:ea typeface="Yu Gothic"/>
                 <a:cs typeface="Yu Gothic"/>
               </a:rPr>
-              <a:t>文書番号 BTR-F-12　｜　版 1.4　｜　所管 予算移管事務局　｜　承認者 IT部門長　｜　最終改訂日 2026-10-11</a:t>
+              <a:t>文書番号 BTR-F-12　｜　版 1.5　｜　所管 予算移管事務局　｜　承認者 IT部門長　｜　最終改訂日 2026-10-12</a:t>
             </a:r>
           </a:p>
         </p:txBody>
@@ -5597,7 +5597,7 @@
                           <a:ea typeface="Yu Gothic"/>
                           <a:cs typeface="Yu Gothic"/>
                         </a:rPr>
-                        <a:t>BTR-F-12　1.4（最終改訂日 2026-10-11）</a:t>
+                        <a:t>BTR-F-12　1.5（最終改訂日 2026-10-12）</a:t>
                       </a:r>
                     </a:p>
                   </a:txBody>

--- a/budget-transfer/reference/12-handbook.pptx
+++ b/budget-transfer/reference/12-handbook.pptx
@@ -3208,7 +3208,7 @@
                 <a:ea typeface="Yu Gothic"/>
                 <a:cs typeface="Yu Gothic"/>
               </a:rPr>
-              <a:t>文書番号 BTR-F-12　｜　版 1.5　｜　所管 予算移管事務局　｜　承認者 IT部門長　｜　最終改訂日 2026-10-12</a:t>
+              <a:t>文書番号 BTR-F-12　｜　版 1.6　｜　所管 予算移管事務局　｜　承認者 IT部門長　｜　最終改訂日 2026-10-17</a:t>
             </a:r>
           </a:p>
         </p:txBody>
@@ -3591,6 +3591,228 @@
                     </a:lnB>
                     <a:solidFill>
                       <a:srgbClr val="1C2B45"/>
+                    </a:solidFill>
+                  </a:tcPr>
+                </a:tc>
+              </a:tr>
+              <a:tr h="324000">
+                <a:tc>
+                  <a:txBody>
+                    <a:bodyPr wrap="square"/>
+                    <a:lstStyle/>
+                    <a:p>
+                      <a:r>
+                        <a:rPr sz="1200" b="0">
+                          <a:solidFill>
+                            <a:srgbClr val="222B38"/>
+                          </a:solidFill>
+                          <a:latin typeface="Yu Gothic"/>
+                          <a:ea typeface="Yu Gothic"/>
+                          <a:cs typeface="Yu Gothic"/>
+                        </a:rPr>
+                        <a:t>1.6</a:t>
+                      </a:r>
+                    </a:p>
+                  </a:txBody>
+                  <a:tcPr marL="54000" marR="54000" marT="28800" marB="28800" anchor="ctr">
+                    <a:lnL w="9525">
+                      <a:solidFill>
+                        <a:srgbClr val="9AA5B5"/>
+                      </a:solidFill>
+                    </a:lnL>
+                    <a:lnR w="9525">
+                      <a:solidFill>
+                        <a:srgbClr val="9AA5B5"/>
+                      </a:solidFill>
+                    </a:lnR>
+                    <a:lnT w="9525">
+                      <a:solidFill>
+                        <a:srgbClr val="9AA5B5"/>
+                      </a:solidFill>
+                    </a:lnT>
+                    <a:lnB w="9525">
+                      <a:solidFill>
+                        <a:srgbClr val="9AA5B5"/>
+                      </a:solidFill>
+                    </a:lnB>
+                    <a:solidFill>
+                      <a:srgbClr val="FFFFFF"/>
+                    </a:solidFill>
+                  </a:tcPr>
+                </a:tc>
+                <a:tc>
+                  <a:txBody>
+                    <a:bodyPr wrap="square"/>
+                    <a:lstStyle/>
+                    <a:p>
+                      <a:r>
+                        <a:rPr sz="1200" b="0">
+                          <a:solidFill>
+                            <a:srgbClr val="222B38"/>
+                          </a:solidFill>
+                          <a:latin typeface="Yu Gothic"/>
+                          <a:ea typeface="Yu Gothic"/>
+                          <a:cs typeface="Yu Gothic"/>
+                        </a:rPr>
+                        <a:t>2026-10-17</a:t>
+                      </a:r>
+                    </a:p>
+                  </a:txBody>
+                  <a:tcPr marL="54000" marR="54000" marT="28800" marB="28800" anchor="ctr">
+                    <a:lnL w="9525">
+                      <a:solidFill>
+                        <a:srgbClr val="9AA5B5"/>
+                      </a:solidFill>
+                    </a:lnL>
+                    <a:lnR w="9525">
+                      <a:solidFill>
+                        <a:srgbClr val="9AA5B5"/>
+                      </a:solidFill>
+                    </a:lnR>
+                    <a:lnT w="9525">
+                      <a:solidFill>
+                        <a:srgbClr val="9AA5B5"/>
+                      </a:solidFill>
+                    </a:lnT>
+                    <a:lnB w="9525">
+                      <a:solidFill>
+                        <a:srgbClr val="9AA5B5"/>
+                      </a:solidFill>
+                    </a:lnB>
+                    <a:solidFill>
+                      <a:srgbClr val="FFFFFF"/>
+                    </a:solidFill>
+                  </a:tcPr>
+                </a:tc>
+                <a:tc>
+                  <a:txBody>
+                    <a:bodyPr wrap="square"/>
+                    <a:lstStyle/>
+                    <a:p>
+                      <a:r>
+                        <a:rPr sz="1200" b="0">
+                          <a:solidFill>
+                            <a:srgbClr val="222B38"/>
+                          </a:solidFill>
+                          <a:latin typeface="Yu Gothic"/>
+                          <a:ea typeface="Yu Gothic"/>
+                          <a:cs typeface="Yu Gothic"/>
+                        </a:rPr>
+                        <a:t>IT予算移管ガイドラインに合わせ、案件担当を窓口担当に改めた</a:t>
+                      </a:r>
+                    </a:p>
+                  </a:txBody>
+                  <a:tcPr marL="54000" marR="54000" marT="28800" marB="28800" anchor="ctr">
+                    <a:lnL w="9525">
+                      <a:solidFill>
+                        <a:srgbClr val="9AA5B5"/>
+                      </a:solidFill>
+                    </a:lnL>
+                    <a:lnR w="9525">
+                      <a:solidFill>
+                        <a:srgbClr val="9AA5B5"/>
+                      </a:solidFill>
+                    </a:lnR>
+                    <a:lnT w="9525">
+                      <a:solidFill>
+                        <a:srgbClr val="9AA5B5"/>
+                      </a:solidFill>
+                    </a:lnT>
+                    <a:lnB w="9525">
+                      <a:solidFill>
+                        <a:srgbClr val="9AA5B5"/>
+                      </a:solidFill>
+                    </a:lnB>
+                    <a:solidFill>
+                      <a:srgbClr val="FFFFFF"/>
+                    </a:solidFill>
+                  </a:tcPr>
+                </a:tc>
+                <a:tc>
+                  <a:txBody>
+                    <a:bodyPr wrap="square"/>
+                    <a:lstStyle/>
+                    <a:p>
+                      <a:r>
+                        <a:rPr sz="1200" b="0">
+                          <a:solidFill>
+                            <a:srgbClr val="222B38"/>
+                          </a:solidFill>
+                          <a:latin typeface="Yu Gothic"/>
+                          <a:ea typeface="Yu Gothic"/>
+                          <a:cs typeface="Yu Gothic"/>
+                        </a:rPr>
+                        <a:t>予算移管事務局</a:t>
+                      </a:r>
+                    </a:p>
+                  </a:txBody>
+                  <a:tcPr marL="54000" marR="54000" marT="28800" marB="28800" anchor="ctr">
+                    <a:lnL w="9525">
+                      <a:solidFill>
+                        <a:srgbClr val="9AA5B5"/>
+                      </a:solidFill>
+                    </a:lnL>
+                    <a:lnR w="9525">
+                      <a:solidFill>
+                        <a:srgbClr val="9AA5B5"/>
+                      </a:solidFill>
+                    </a:lnR>
+                    <a:lnT w="9525">
+                      <a:solidFill>
+                        <a:srgbClr val="9AA5B5"/>
+                      </a:solidFill>
+                    </a:lnT>
+                    <a:lnB w="9525">
+                      <a:solidFill>
+                        <a:srgbClr val="9AA5B5"/>
+                      </a:solidFill>
+                    </a:lnB>
+                    <a:solidFill>
+                      <a:srgbClr val="FFFFFF"/>
+                    </a:solidFill>
+                  </a:tcPr>
+                </a:tc>
+                <a:tc>
+                  <a:txBody>
+                    <a:bodyPr wrap="square"/>
+                    <a:lstStyle/>
+                    <a:p>
+                      <a:r>
+                        <a:rPr sz="1200" b="0">
+                          <a:solidFill>
+                            <a:srgbClr val="222B38"/>
+                          </a:solidFill>
+                          <a:latin typeface="Yu Gothic"/>
+                          <a:ea typeface="Yu Gothic"/>
+                          <a:cs typeface="Yu Gothic"/>
+                        </a:rPr>
+                        <a:t/>
+                      </a:r>
+                    </a:p>
+                  </a:txBody>
+                  <a:tcPr marL="54000" marR="54000" marT="28800" marB="28800" anchor="ctr">
+                    <a:lnL w="9525">
+                      <a:solidFill>
+                        <a:srgbClr val="9AA5B5"/>
+                      </a:solidFill>
+                    </a:lnL>
+                    <a:lnR w="9525">
+                      <a:solidFill>
+                        <a:srgbClr val="9AA5B5"/>
+                      </a:solidFill>
+                    </a:lnR>
+                    <a:lnT w="9525">
+                      <a:solidFill>
+                        <a:srgbClr val="9AA5B5"/>
+                      </a:solidFill>
+                    </a:lnT>
+                    <a:lnB w="9525">
+                      <a:solidFill>
+                        <a:srgbClr val="9AA5B5"/>
+                      </a:solidFill>
+                    </a:lnB>
+                    <a:solidFill>
+                      <a:srgbClr val="FFFFFF"/>
                     </a:solidFill>
                   </a:tcPr>
                 </a:tc>
@@ -5597,7 +5819,7 @@
                           <a:ea typeface="Yu Gothic"/>
                           <a:cs typeface="Yu Gothic"/>
                         </a:rPr>
-                        <a:t>BTR-F-12　1.5（最終改訂日 2026-10-12）</a:t>
+                        <a:t>BTR-F-12　1.6（最終改訂日 2026-10-17）</a:t>
                       </a:r>
                     </a:p>
                   </a:txBody>
@@ -6093,7 +6315,7 @@
                 <a:ea typeface="Yu Gothic"/>
                 <a:cs typeface="Yu Gothic"/>
               </a:rPr>
-              <a:t>普段の窓口の IT部門メンバー（案件担当）が、システム・業務・契約を伺い、整理します。1回60分程度、1〜2回です</a:t>
+              <a:t>普段の窓口の IT部門メンバー（窓口担当）が、システム・業務・契約を伺い、整理します。1回60分程度、1〜2回です</a:t>
             </a:r>
           </a:p>
         </p:txBody>
@@ -9034,7 +9256,7 @@
                 <a:ea typeface="Yu Gothic"/>
                 <a:cs typeface="Yu Gothic"/>
               </a:rPr>
-              <a:t>移管の作業は、IT部門の進行役と、案件ごとの案件担当（普段の窓口のメンバー）が行います。各部門の責任者には承認を、担当者には情報と資料のご提供をお願いします。</a:t>
+              <a:t>移管の作業は、IT部門の事務局と、案件ごとの窓口担当（普段の窓口のメンバー）が行います。各部門の責任者には承認を、担当者には情報と資料のご提供をお願いします。</a:t>
             </a:r>
           </a:p>
         </p:txBody>
@@ -9470,7 +9692,7 @@
                           <a:ea typeface="Yu Gothic"/>
                           <a:cs typeface="Yu Gothic"/>
                         </a:rPr>
-                        <a:t>案件担当の質問に答え、手元の資料を渡す（担当者）</a:t>
+                        <a:t>窓口担当の質問に答え、手元の資料を渡す（担当者）</a:t>
                       </a:r>
                     </a:p>
                   </a:txBody>
@@ -9694,7 +9916,7 @@
                           <a:ea typeface="Yu Gothic"/>
                           <a:cs typeface="Yu Gothic"/>
                         </a:rPr>
-                        <a:t>合意の期限</a:t>
+                        <a:t>合意の目安</a:t>
                       </a:r>
                     </a:p>
                   </a:txBody>
@@ -10085,7 +10307,7 @@
                 <a:ea typeface="Yu Gothic"/>
                 <a:cs typeface="Yu Gothic"/>
               </a:rPr>
-              <a:t>移管する予算も含めて、必要な予算はこれまでどおり部門の予算に計上してください。確認や承認が期限に間に合わない場合は、期限の前に案件担当か予算移管事務局に相談してください。</a:t>
+              <a:t>移管する予算も含めて、必要な予算はこれまでどおり部門の予算に計上してください。確認や承認が期限に間に合わない場合は、期限の前に窓口担当か予算移管事務局に相談してください。</a:t>
             </a:r>
           </a:p>
         </p:txBody>
